--- a/02Integration/template.pptx
+++ b/02Integration/template.pptx
@@ -6,6 +6,7 @@
   </p:sldMasterIdLst>
   <p:sldIdLst>
     <p:sldId id="256" r:id="rId2"/>
+    <p:sldId id="257" r:id="rId3"/>
   </p:sldIdLst>
   <p:sldSz cx="12192000" cy="6858000"/>
   <p:notesSz cx="6858000" cy="9144000"/>
@@ -2790,7 +2791,7 @@
           <a:lstStyle/>
           <a:p>
             <a:r>
-              <a:rPr lang="fr-FR"/>
+              <a:rPr lang="fr-FR" dirty="0"/>
               <a:t>Modifiez le style du titre</a:t>
             </a:r>
           </a:p>
@@ -3031,7 +3032,7 @@
           <a:spcPct val="0"/>
         </a:spcBef>
         <a:buNone/>
-        <a:defRPr sz="4400" kern="1200">
+        <a:defRPr sz="2000" kern="1200">
           <a:solidFill>
             <a:schemeClr val="tx1"/>
           </a:solidFill>
@@ -3051,7 +3052,7 @@
         </a:spcBef>
         <a:buFont typeface="Arial" panose="020B0604020202020204" pitchFamily="34" charset="0"/>
         <a:buChar char="•"/>
-        <a:defRPr sz="2800" kern="1200">
+        <a:defRPr sz="1400" kern="1200">
           <a:solidFill>
             <a:schemeClr val="tx1"/>
           </a:solidFill>
@@ -3069,7 +3070,7 @@
         </a:spcBef>
         <a:buFont typeface="Arial" panose="020B0604020202020204" pitchFamily="34" charset="0"/>
         <a:buChar char="•"/>
-        <a:defRPr sz="2400" kern="1200">
+        <a:defRPr sz="1200" kern="1200">
           <a:solidFill>
             <a:schemeClr val="tx1"/>
           </a:solidFill>
@@ -3087,7 +3088,7 @@
         </a:spcBef>
         <a:buFont typeface="Arial" panose="020B0604020202020204" pitchFamily="34" charset="0"/>
         <a:buChar char="•"/>
-        <a:defRPr sz="2000" kern="1200">
+        <a:defRPr sz="1100" kern="1200">
           <a:solidFill>
             <a:schemeClr val="tx1"/>
           </a:solidFill>
@@ -3105,7 +3106,7 @@
         </a:spcBef>
         <a:buFont typeface="Arial" panose="020B0604020202020204" pitchFamily="34" charset="0"/>
         <a:buChar char="•"/>
-        <a:defRPr sz="1800" kern="1200">
+        <a:defRPr sz="1050" kern="1200">
           <a:solidFill>
             <a:schemeClr val="tx1"/>
           </a:solidFill>
@@ -3123,7 +3124,7 @@
         </a:spcBef>
         <a:buFont typeface="Arial" panose="020B0604020202020204" pitchFamily="34" charset="0"/>
         <a:buChar char="•"/>
-        <a:defRPr sz="1800" kern="1200">
+        <a:defRPr sz="1050" kern="1200">
           <a:solidFill>
             <a:schemeClr val="tx1"/>
           </a:solidFill>
@@ -3342,7 +3343,10 @@
           <a:bodyPr/>
           <a:lstStyle/>
           <a:p>
-            <a:endParaRPr lang="fr-FR"/>
+            <a:r>
+              <a:rPr lang="fr-FR" dirty="0"/>
+              <a:t>Titre</a:t>
+            </a:r>
           </a:p>
         </p:txBody>
       </p:sp>
@@ -3367,7 +3371,10 @@
           <a:bodyPr/>
           <a:lstStyle/>
           <a:p>
-            <a:endParaRPr lang="fr-FR"/>
+            <a:r>
+              <a:rPr lang="fr-FR" dirty="0"/>
+              <a:t>Auteur</a:t>
+            </a:r>
           </a:p>
         </p:txBody>
       </p:sp>
@@ -3375,6 +3382,92 @@
     <p:extLst>
       <p:ext uri="{BB962C8B-B14F-4D97-AF65-F5344CB8AC3E}">
         <p14:creationId xmlns:p14="http://schemas.microsoft.com/office/powerpoint/2010/main" val="4069984472"/>
+      </p:ext>
+    </p:extLst>
+  </p:cSld>
+  <p:clrMapOvr>
+    <a:masterClrMapping/>
+  </p:clrMapOvr>
+</p:sld>
+</file>
+
+<file path=ppt/slides/slide2.xml><?xml version="1.0" encoding="utf-8"?>
+<p:sld xmlns:a="http://schemas.openxmlformats.org/drawingml/2006/main" xmlns:r="http://schemas.openxmlformats.org/officeDocument/2006/relationships" xmlns:p="http://schemas.openxmlformats.org/presentationml/2006/main">
+  <p:cSld>
+    <p:spTree>
+      <p:nvGrpSpPr>
+        <p:cNvPr id="1" name=""/>
+        <p:cNvGrpSpPr/>
+        <p:nvPr/>
+      </p:nvGrpSpPr>
+      <p:grpSpPr>
+        <a:xfrm>
+          <a:off x="0" y="0"/>
+          <a:ext cx="0" cy="0"/>
+          <a:chOff x="0" y="0"/>
+          <a:chExt cx="0" cy="0"/>
+        </a:xfrm>
+      </p:grpSpPr>
+      <p:sp>
+        <p:nvSpPr>
+          <p:cNvPr id="2" name="Titre 1">
+            <a:extLst>
+              <a:ext uri="{FF2B5EF4-FFF2-40B4-BE49-F238E27FC236}">
+                <a16:creationId xmlns:a16="http://schemas.microsoft.com/office/drawing/2014/main" id="{E6BE44E4-F1AB-C820-C189-96E9F1709A51}"/>
+              </a:ext>
+            </a:extLst>
+          </p:cNvPr>
+          <p:cNvSpPr>
+            <a:spLocks noGrp="1"/>
+          </p:cNvSpPr>
+          <p:nvPr>
+            <p:ph type="title"/>
+          </p:nvPr>
+        </p:nvSpPr>
+        <p:spPr/>
+        <p:txBody>
+          <a:bodyPr/>
+          <a:lstStyle/>
+          <a:p>
+            <a:r>
+              <a:rPr lang="fr-FR" dirty="0"/>
+              <a:t>Titre de slide normale</a:t>
+            </a:r>
+          </a:p>
+        </p:txBody>
+      </p:sp>
+      <p:sp>
+        <p:nvSpPr>
+          <p:cNvPr id="3" name="Espace réservé du contenu 2">
+            <a:extLst>
+              <a:ext uri="{FF2B5EF4-FFF2-40B4-BE49-F238E27FC236}">
+                <a16:creationId xmlns:a16="http://schemas.microsoft.com/office/drawing/2014/main" id="{4B0B37D0-2DDD-7CDB-9CBC-042500506977}"/>
+              </a:ext>
+            </a:extLst>
+          </p:cNvPr>
+          <p:cNvSpPr>
+            <a:spLocks noGrp="1"/>
+          </p:cNvSpPr>
+          <p:nvPr>
+            <p:ph idx="1"/>
+          </p:nvPr>
+        </p:nvSpPr>
+        <p:spPr/>
+        <p:txBody>
+          <a:bodyPr/>
+          <a:lstStyle/>
+          <a:p>
+            <a:r>
+              <a:rPr lang="fr-FR" dirty="0"/>
+              <a:t>Contenu avec du code s’il le faut</a:t>
+            </a:r>
+          </a:p>
+        </p:txBody>
+      </p:sp>
+    </p:spTree>
+    <p:extLst>
+      <p:ext uri="{BB962C8B-B14F-4D97-AF65-F5344CB8AC3E}">
+        <p14:creationId xmlns:p14="http://schemas.microsoft.com/office/powerpoint/2010/main" val="2518193826"/>
       </p:ext>
     </p:extLst>
   </p:cSld>
